--- a/05-AI应用基础48课时版/V2授课PPT/W19-第21次课-多智能体检修调度（上）：.pptx
+++ b/05-AI应用基础48课时版/V2授课PPT/W19-第21次课-多智能体检修调度（上）：.pptx
@@ -63339,7 +63339,7 @@
                 </a:solidFill>
                 <a:latin typeface="微软雅黑"/>
               </a:rPr>
-              <a:t>下次课预告（第20周）</a:t>
+              <a:t>下次课预告（第19周）</a:t>
             </a:r>
           </a:p>
         </p:txBody>
